--- a/第5章-文件操作与异常处理/第5章-文件操作与异常处理.pptx
+++ b/第5章-文件操作与异常处理/第5章-文件操作与异常处理.pptx
@@ -442,792 +442,29 @@
 </p:cmAuthorLst>
 </file>
 
-<file path=ppt/revisionInfo.xml><?xml version="1.0" encoding="utf-8"?>
-<p1510:revInfo xmlns:a="http://schemas.openxmlformats.org/drawingml/2006/main" xmlns:r="http://schemas.openxmlformats.org/officeDocument/2006/relationships" xmlns:p1510="http://schemas.microsoft.com/office/powerpoint/2015/10/main">
-  <p1510:revLst>
-    <p1510:client id="{8A5F66E1-7174-D546-B865-3F1108B5FC7B}" v="98" dt="2025-06-03T15:56:08.829"/>
-  </p1510:revLst>
-</p1510:revInfo>
-</file>
-
 <file path=ppt/changesInfos/changesInfo1.xml><?xml version="1.0" encoding="utf-8"?>
 <pc:chgInfo xmlns:a="http://schemas.openxmlformats.org/drawingml/2006/main" xmlns:r="http://schemas.openxmlformats.org/officeDocument/2006/relationships" xmlns:ac="http://schemas.microsoft.com/office/drawing/2013/main/command" xmlns:pc="http://schemas.microsoft.com/office/powerpoint/2013/main/command">
   <pc:docChgLst>
-    <pc:chgData name="Xin Luo" userId="82312ee5779919a4" providerId="LiveId" clId="{2800F99A-8A54-2B47-A823-B15E42F1D981}"/>
-    <pc:docChg chg="custSel delSld modSld">
-      <pc:chgData name="Xin Luo" userId="82312ee5779919a4" providerId="LiveId" clId="{2800F99A-8A54-2B47-A823-B15E42F1D981}" dt="2025-05-08T15:37:54.066" v="192" actId="20577"/>
-      <pc:docMkLst>
-        <pc:docMk/>
-      </pc:docMkLst>
-      <pc:sldChg chg="delSp modSp mod">
-        <pc:chgData name="Xin Luo" userId="82312ee5779919a4" providerId="LiveId" clId="{2800F99A-8A54-2B47-A823-B15E42F1D981}" dt="2025-05-08T15:36:56.172" v="86" actId="1035"/>
-        <pc:sldMkLst>
-          <pc:docMk/>
-          <pc:sldMk cId="1576120367" sldId="2387"/>
-        </pc:sldMkLst>
-        <pc:spChg chg="mod">
-          <ac:chgData name="Xin Luo" userId="82312ee5779919a4" providerId="LiveId" clId="{2800F99A-8A54-2B47-A823-B15E42F1D981}" dt="2025-05-08T15:36:24.338" v="35" actId="20577"/>
-          <ac:spMkLst>
-            <pc:docMk/>
-            <pc:sldMk cId="1576120367" sldId="2387"/>
-            <ac:spMk id="5" creationId="{494DAA55-5621-28DB-D255-E0EBB6C6477B}"/>
-          </ac:spMkLst>
-        </pc:spChg>
-        <pc:spChg chg="mod">
-          <ac:chgData name="Xin Luo" userId="82312ee5779919a4" providerId="LiveId" clId="{2800F99A-8A54-2B47-A823-B15E42F1D981}" dt="2025-05-08T15:36:45.371" v="48" actId="20577"/>
-          <ac:spMkLst>
-            <pc:docMk/>
-            <pc:sldMk cId="1576120367" sldId="2387"/>
-            <ac:spMk id="14" creationId="{00000000-0000-0000-0000-000000000000}"/>
-          </ac:spMkLst>
-        </pc:spChg>
-        <pc:grpChg chg="mod">
-          <ac:chgData name="Xin Luo" userId="82312ee5779919a4" providerId="LiveId" clId="{2800F99A-8A54-2B47-A823-B15E42F1D981}" dt="2025-05-08T15:36:56.172" v="86" actId="1035"/>
-          <ac:grpSpMkLst>
-            <pc:docMk/>
-            <pc:sldMk cId="1576120367" sldId="2387"/>
-            <ac:grpSpMk id="2" creationId="{AFCAA61D-767A-24EA-9072-7425684288BB}"/>
-          </ac:grpSpMkLst>
-        </pc:grpChg>
-        <pc:grpChg chg="mod">
-          <ac:chgData name="Xin Luo" userId="82312ee5779919a4" providerId="LiveId" clId="{2800F99A-8A54-2B47-A823-B15E42F1D981}" dt="2025-05-08T15:36:56.172" v="86" actId="1035"/>
-          <ac:grpSpMkLst>
-            <pc:docMk/>
-            <pc:sldMk cId="1576120367" sldId="2387"/>
-            <ac:grpSpMk id="3" creationId="{12ED16A1-79B8-7DB1-1CC1-250B051BAD58}"/>
-          </ac:grpSpMkLst>
-        </pc:grpChg>
-      </pc:sldChg>
-      <pc:sldChg chg="modSp mod">
-        <pc:chgData name="Xin Luo" userId="82312ee5779919a4" providerId="LiveId" clId="{2800F99A-8A54-2B47-A823-B15E42F1D981}" dt="2025-05-08T15:37:14.888" v="125" actId="20577"/>
-        <pc:sldMkLst>
-          <pc:docMk/>
-          <pc:sldMk cId="2415901206" sldId="2447"/>
-        </pc:sldMkLst>
-        <pc:spChg chg="mod">
-          <ac:chgData name="Xin Luo" userId="82312ee5779919a4" providerId="LiveId" clId="{2800F99A-8A54-2B47-A823-B15E42F1D981}" dt="2025-05-08T15:37:14.888" v="125" actId="20577"/>
-          <ac:spMkLst>
-            <pc:docMk/>
-            <pc:sldMk cId="2415901206" sldId="2447"/>
-            <ac:spMk id="7" creationId="{00000000-0000-0000-0000-000000000000}"/>
-          </ac:spMkLst>
-        </pc:spChg>
-      </pc:sldChg>
-      <pc:sldChg chg="modSp mod">
-        <pc:chgData name="Xin Luo" userId="82312ee5779919a4" providerId="LiveId" clId="{2800F99A-8A54-2B47-A823-B15E42F1D981}" dt="2025-05-08T15:37:54.066" v="192" actId="20577"/>
-        <pc:sldMkLst>
-          <pc:docMk/>
-          <pc:sldMk cId="481122590" sldId="2709"/>
-        </pc:sldMkLst>
-        <pc:spChg chg="mod">
-          <ac:chgData name="Xin Luo" userId="82312ee5779919a4" providerId="LiveId" clId="{2800F99A-8A54-2B47-A823-B15E42F1D981}" dt="2025-05-08T15:37:54.066" v="192" actId="20577"/>
-          <ac:spMkLst>
-            <pc:docMk/>
-            <pc:sldMk cId="481122590" sldId="2709"/>
-            <ac:spMk id="7" creationId="{00000000-0000-0000-0000-000000000000}"/>
-          </ac:spMkLst>
-        </pc:spChg>
-      </pc:sldChg>
-      <pc:sldChg chg="del">
-        <pc:chgData name="Xin Luo" userId="82312ee5779919a4" providerId="LiveId" clId="{2800F99A-8A54-2B47-A823-B15E42F1D981}" dt="2025-05-08T15:37:45.289" v="168" actId="2696"/>
-        <pc:sldMkLst>
-          <pc:docMk/>
-          <pc:sldMk cId="972163772" sldId="2720"/>
-        </pc:sldMkLst>
-      </pc:sldChg>
-      <pc:sldChg chg="delSp modSp mod">
-        <pc:chgData name="Xin Luo" userId="82312ee5779919a4" providerId="LiveId" clId="{2800F99A-8A54-2B47-A823-B15E42F1D981}" dt="2025-05-08T15:37:38.667" v="164" actId="20577"/>
-        <pc:sldMkLst>
-          <pc:docMk/>
-          <pc:sldMk cId="3053350483" sldId="2729"/>
-        </pc:sldMkLst>
-        <pc:spChg chg="mod">
-          <ac:chgData name="Xin Luo" userId="82312ee5779919a4" providerId="LiveId" clId="{2800F99A-8A54-2B47-A823-B15E42F1D981}" dt="2025-05-08T15:37:27.788" v="128" actId="20577"/>
-          <ac:spMkLst>
-            <pc:docMk/>
-            <pc:sldMk cId="3053350483" sldId="2729"/>
-            <ac:spMk id="2" creationId="{631AADB6-C88A-D817-4683-FC087E4E240F}"/>
-          </ac:spMkLst>
-        </pc:spChg>
-        <pc:spChg chg="mod">
-          <ac:chgData name="Xin Luo" userId="82312ee5779919a4" providerId="LiveId" clId="{2800F99A-8A54-2B47-A823-B15E42F1D981}" dt="2025-05-08T15:37:38.667" v="164" actId="20577"/>
-          <ac:spMkLst>
-            <pc:docMk/>
-            <pc:sldMk cId="3053350483" sldId="2729"/>
-            <ac:spMk id="3" creationId="{00000000-0000-0000-0000-000000000000}"/>
-          </ac:spMkLst>
-        </pc:spChg>
-      </pc:sldChg>
-      <pc:sldChg chg="del">
-        <pc:chgData name="Xin Luo" userId="82312ee5779919a4" providerId="LiveId" clId="{2800F99A-8A54-2B47-A823-B15E42F1D981}" dt="2025-05-08T15:37:43.655" v="166" actId="2696"/>
-        <pc:sldMkLst>
-          <pc:docMk/>
-          <pc:sldMk cId="1201927867" sldId="2730"/>
-        </pc:sldMkLst>
-      </pc:sldChg>
-      <pc:sldChg chg="del">
-        <pc:chgData name="Xin Luo" userId="82312ee5779919a4" providerId="LiveId" clId="{2800F99A-8A54-2B47-A823-B15E42F1D981}" dt="2025-05-08T15:37:43.651" v="165" actId="2696"/>
-        <pc:sldMkLst>
-          <pc:docMk/>
-          <pc:sldMk cId="3947651410" sldId="2767"/>
-        </pc:sldMkLst>
-      </pc:sldChg>
-      <pc:sldChg chg="del">
-        <pc:chgData name="Xin Luo" userId="82312ee5779919a4" providerId="LiveId" clId="{2800F99A-8A54-2B47-A823-B15E42F1D981}" dt="2025-05-08T15:37:43.656" v="167" actId="2696"/>
-        <pc:sldMkLst>
-          <pc:docMk/>
-          <pc:sldMk cId="4149704501" sldId="2768"/>
-        </pc:sldMkLst>
-      </pc:sldChg>
-    </pc:docChg>
-  </pc:docChgLst>
-  <pc:docChgLst>
-    <pc:chgData name="Xin Luo" userId="82312ee5779919a4" providerId="LiveId" clId="{8A5F66E1-7174-D546-B865-3F1108B5FC7B}"/>
-    <pc:docChg chg="undo custSel addSld delSld modSld sldOrd">
-      <pc:chgData name="Xin Luo" userId="82312ee5779919a4" providerId="LiveId" clId="{8A5F66E1-7174-D546-B865-3F1108B5FC7B}" dt="2025-06-03T15:57:29.321" v="2603" actId="20577"/>
+    <pc:chgData name="Xin Luo" userId="82312ee5779919a4" providerId="LiveId" clId="{4B16E866-FFF1-585A-8670-68209B92BFC1}"/>
+    <pc:docChg chg="modSld">
+      <pc:chgData name="Xin Luo" userId="82312ee5779919a4" providerId="LiveId" clId="{4B16E866-FFF1-585A-8670-68209B92BFC1}" dt="2026-08-27T06:27:11.553" v="1" actId="20577"/>
       <pc:docMkLst>
         <pc:docMk/>
       </pc:docMkLst>
       <pc:sldChg chg="modSp mod">
-        <pc:chgData name="Xin Luo" userId="82312ee5779919a4" providerId="LiveId" clId="{8A5F66E1-7174-D546-B865-3F1108B5FC7B}" dt="2025-05-25T14:18:31.255" v="26" actId="20577"/>
+        <pc:chgData name="Xin Luo" userId="82312ee5779919a4" providerId="LiveId" clId="{4B16E866-FFF1-585A-8670-68209B92BFC1}" dt="2026-08-27T06:27:11.553" v="1" actId="20577"/>
         <pc:sldMkLst>
           <pc:docMk/>
-          <pc:sldMk cId="1576120367" sldId="2387"/>
+          <pc:sldMk cId="4207004688" sldId="2741"/>
         </pc:sldMkLst>
         <pc:spChg chg="mod">
-          <ac:chgData name="Xin Luo" userId="82312ee5779919a4" providerId="LiveId" clId="{8A5F66E1-7174-D546-B865-3F1108B5FC7B}" dt="2025-05-25T14:18:31.255" v="26" actId="20577"/>
+          <ac:chgData name="Xin Luo" userId="82312ee5779919a4" providerId="LiveId" clId="{4B16E866-FFF1-585A-8670-68209B92BFC1}" dt="2026-08-27T06:27:11.553" v="1" actId="20577"/>
           <ac:spMkLst>
             <pc:docMk/>
-            <pc:sldMk cId="1576120367" sldId="2387"/>
-            <ac:spMk id="5" creationId="{494DAA55-5621-28DB-D255-E0EBB6C6477B}"/>
+            <pc:sldMk cId="4207004688" sldId="2741"/>
+            <ac:spMk id="4" creationId="{DBE2EB52-1153-547D-4DDB-F105FCA1059C}"/>
           </ac:spMkLst>
         </pc:spChg>
-      </pc:sldChg>
-      <pc:sldChg chg="modSp mod">
-        <pc:chgData name="Xin Luo" userId="82312ee5779919a4" providerId="LiveId" clId="{8A5F66E1-7174-D546-B865-3F1108B5FC7B}" dt="2025-05-25T14:18:38.078" v="42" actId="20577"/>
-        <pc:sldMkLst>
-          <pc:docMk/>
-          <pc:sldMk cId="2415901206" sldId="2447"/>
-        </pc:sldMkLst>
-        <pc:spChg chg="mod">
-          <ac:chgData name="Xin Luo" userId="82312ee5779919a4" providerId="LiveId" clId="{8A5F66E1-7174-D546-B865-3F1108B5FC7B}" dt="2025-05-25T14:18:38.078" v="42" actId="20577"/>
-          <ac:spMkLst>
-            <pc:docMk/>
-            <pc:sldMk cId="2415901206" sldId="2447"/>
-            <ac:spMk id="7" creationId="{00000000-0000-0000-0000-000000000000}"/>
-          </ac:spMkLst>
-        </pc:spChg>
-      </pc:sldChg>
-      <pc:sldChg chg="modSp mod modNotesTx">
-        <pc:chgData name="Xin Luo" userId="82312ee5779919a4" providerId="LiveId" clId="{8A5F66E1-7174-D546-B865-3F1108B5FC7B}" dt="2025-06-03T12:16:41.960" v="1495" actId="20577"/>
-        <pc:sldMkLst>
-          <pc:docMk/>
-          <pc:sldMk cId="3053350483" sldId="2729"/>
-        </pc:sldMkLst>
-        <pc:spChg chg="mod">
-          <ac:chgData name="Xin Luo" userId="82312ee5779919a4" providerId="LiveId" clId="{8A5F66E1-7174-D546-B865-3F1108B5FC7B}" dt="2025-06-03T12:16:34.351" v="1494" actId="2710"/>
-          <ac:spMkLst>
-            <pc:docMk/>
-            <pc:sldMk cId="3053350483" sldId="2729"/>
-            <ac:spMk id="2" creationId="{631AADB6-C88A-D817-4683-FC087E4E240F}"/>
-          </ac:spMkLst>
-        </pc:spChg>
-        <pc:spChg chg="mod">
-          <ac:chgData name="Xin Luo" userId="82312ee5779919a4" providerId="LiveId" clId="{8A5F66E1-7174-D546-B865-3F1108B5FC7B}" dt="2025-05-25T14:18:46.912" v="60" actId="20577"/>
-          <ac:spMkLst>
-            <pc:docMk/>
-            <pc:sldMk cId="3053350483" sldId="2729"/>
-            <ac:spMk id="3" creationId="{00000000-0000-0000-0000-000000000000}"/>
-          </ac:spMkLst>
-        </pc:spChg>
-      </pc:sldChg>
-      <pc:sldChg chg="addSp delSp modSp add mod modNotesTx">
-        <pc:chgData name="Xin Luo" userId="82312ee5779919a4" providerId="LiveId" clId="{8A5F66E1-7174-D546-B865-3F1108B5FC7B}" dt="2025-06-03T13:22:02.369" v="1765" actId="20577"/>
-        <pc:sldMkLst>
-          <pc:docMk/>
-          <pc:sldMk cId="4239811127" sldId="2761"/>
-        </pc:sldMkLst>
-        <pc:spChg chg="mod">
-          <ac:chgData name="Xin Luo" userId="82312ee5779919a4" providerId="LiveId" clId="{8A5F66E1-7174-D546-B865-3F1108B5FC7B}" dt="2025-05-25T14:24:09.372" v="298" actId="20577"/>
-          <ac:spMkLst>
-            <pc:docMk/>
-            <pc:sldMk cId="4239811127" sldId="2761"/>
-            <ac:spMk id="2" creationId="{DD5FBB75-C873-9630-9F82-9B9B22559887}"/>
-          </ac:spMkLst>
-        </pc:spChg>
-        <pc:spChg chg="add mod">
-          <ac:chgData name="Xin Luo" userId="82312ee5779919a4" providerId="LiveId" clId="{8A5F66E1-7174-D546-B865-3F1108B5FC7B}" dt="2025-06-03T12:40:30.398" v="1712" actId="14100"/>
-          <ac:spMkLst>
-            <pc:docMk/>
-            <pc:sldMk cId="4239811127" sldId="2761"/>
-            <ac:spMk id="5" creationId="{8B68AE6F-FE82-B526-1BC3-E305A77D933B}"/>
-          </ac:spMkLst>
-        </pc:spChg>
-        <pc:spChg chg="add mod">
-          <ac:chgData name="Xin Luo" userId="82312ee5779919a4" providerId="LiveId" clId="{8A5F66E1-7174-D546-B865-3F1108B5FC7B}" dt="2025-06-03T13:21:54.092" v="1744" actId="14100"/>
-          <ac:spMkLst>
-            <pc:docMk/>
-            <pc:sldMk cId="4239811127" sldId="2761"/>
-            <ac:spMk id="7" creationId="{B6278F62-21CF-99FF-ACC3-FC7BF73BBA87}"/>
-          </ac:spMkLst>
-        </pc:spChg>
-        <pc:spChg chg="add mod">
-          <ac:chgData name="Xin Luo" userId="82312ee5779919a4" providerId="LiveId" clId="{8A5F66E1-7174-D546-B865-3F1108B5FC7B}" dt="2025-06-03T12:38:59.976" v="1693" actId="1076"/>
-          <ac:spMkLst>
-            <pc:docMk/>
-            <pc:sldMk cId="4239811127" sldId="2761"/>
-            <ac:spMk id="9" creationId="{6DA4D21F-3AA4-7EB2-A603-06B4FFB69445}"/>
-          </ac:spMkLst>
-        </pc:spChg>
-        <pc:spChg chg="add mod">
-          <ac:chgData name="Xin Luo" userId="82312ee5779919a4" providerId="LiveId" clId="{8A5F66E1-7174-D546-B865-3F1108B5FC7B}" dt="2025-06-03T13:14:38.886" v="1735" actId="14100"/>
-          <ac:spMkLst>
-            <pc:docMk/>
-            <pc:sldMk cId="4239811127" sldId="2761"/>
-            <ac:spMk id="10" creationId="{A4B43794-58A3-091B-8B1E-163D9FE90AA5}"/>
-          </ac:spMkLst>
-        </pc:spChg>
-        <pc:spChg chg="add mod">
-          <ac:chgData name="Xin Luo" userId="82312ee5779919a4" providerId="LiveId" clId="{8A5F66E1-7174-D546-B865-3F1108B5FC7B}" dt="2025-06-03T12:38:55.548" v="1692" actId="167"/>
-          <ac:spMkLst>
-            <pc:docMk/>
-            <pc:sldMk cId="4239811127" sldId="2761"/>
-            <ac:spMk id="12" creationId="{D0340C47-2142-6687-B0B5-73A79DE3ED4E}"/>
-          </ac:spMkLst>
-        </pc:spChg>
-        <pc:spChg chg="add mod">
-          <ac:chgData name="Xin Luo" userId="82312ee5779919a4" providerId="LiveId" clId="{8A5F66E1-7174-D546-B865-3F1108B5FC7B}" dt="2025-06-03T12:39:28.881" v="1703" actId="1076"/>
-          <ac:spMkLst>
-            <pc:docMk/>
-            <pc:sldMk cId="4239811127" sldId="2761"/>
-            <ac:spMk id="14" creationId="{931BE0F3-6D7E-0FF7-42A0-6956455EC0DD}"/>
-          </ac:spMkLst>
-        </pc:spChg>
-        <pc:grpChg chg="add mod">
-          <ac:chgData name="Xin Luo" userId="82312ee5779919a4" providerId="LiveId" clId="{8A5F66E1-7174-D546-B865-3F1108B5FC7B}" dt="2025-06-03T12:40:24.600" v="1710" actId="14100"/>
-          <ac:grpSpMkLst>
-            <pc:docMk/>
-            <pc:sldMk cId="4239811127" sldId="2761"/>
-            <ac:grpSpMk id="11" creationId="{50C71145-A01C-BCAD-BDCF-449737A307CE}"/>
-          </ac:grpSpMkLst>
-        </pc:grpChg>
-        <pc:grpChg chg="add mod">
-          <ac:chgData name="Xin Luo" userId="82312ee5779919a4" providerId="LiveId" clId="{8A5F66E1-7174-D546-B865-3F1108B5FC7B}" dt="2025-06-03T13:14:31.431" v="1733" actId="14100"/>
-          <ac:grpSpMkLst>
-            <pc:docMk/>
-            <pc:sldMk cId="4239811127" sldId="2761"/>
-            <ac:grpSpMk id="13" creationId="{8AC1881E-388E-2642-A072-0ABAD616593A}"/>
-          </ac:grpSpMkLst>
-        </pc:grpChg>
-        <pc:grpChg chg="add mod">
-          <ac:chgData name="Xin Luo" userId="82312ee5779919a4" providerId="LiveId" clId="{8A5F66E1-7174-D546-B865-3F1108B5FC7B}" dt="2025-06-03T13:14:31.431" v="1733" actId="14100"/>
-          <ac:grpSpMkLst>
-            <pc:docMk/>
-            <pc:sldMk cId="4239811127" sldId="2761"/>
-            <ac:grpSpMk id="15" creationId="{0A71FC3A-2DB6-8E7C-6B3D-2E41112FBF88}"/>
-          </ac:grpSpMkLst>
-        </pc:grpChg>
-        <pc:graphicFrameChg chg="add mod modGraphic">
-          <ac:chgData name="Xin Luo" userId="82312ee5779919a4" providerId="LiveId" clId="{8A5F66E1-7174-D546-B865-3F1108B5FC7B}" dt="2025-06-03T13:22:02.369" v="1765" actId="20577"/>
-          <ac:graphicFrameMkLst>
-            <pc:docMk/>
-            <pc:sldMk cId="4239811127" sldId="2761"/>
-            <ac:graphicFrameMk id="4" creationId="{164AFA17-6E5E-2F58-E73B-77CBACAD0991}"/>
-          </ac:graphicFrameMkLst>
-        </pc:graphicFrameChg>
-        <pc:picChg chg="add del mod">
-          <ac:chgData name="Xin Luo" userId="82312ee5779919a4" providerId="LiveId" clId="{8A5F66E1-7174-D546-B865-3F1108B5FC7B}" dt="2025-06-03T13:13:50.103" v="1719" actId="478"/>
-          <ac:picMkLst>
-            <pc:docMk/>
-            <pc:sldMk cId="4239811127" sldId="2761"/>
-            <ac:picMk id="6" creationId="{9AE49A91-1F7B-7ECB-F8F5-1E0BA8D7E68F}"/>
-          </ac:picMkLst>
-        </pc:picChg>
-        <pc:picChg chg="add del mod">
-          <ac:chgData name="Xin Luo" userId="82312ee5779919a4" providerId="LiveId" clId="{8A5F66E1-7174-D546-B865-3F1108B5FC7B}" dt="2025-06-03T13:14:07.814" v="1726" actId="478"/>
-          <ac:picMkLst>
-            <pc:docMk/>
-            <pc:sldMk cId="4239811127" sldId="2761"/>
-            <ac:picMk id="8" creationId="{5B465C96-00DA-96B8-2BF7-7DAEC3951F1C}"/>
-          </ac:picMkLst>
-        </pc:picChg>
-        <pc:picChg chg="add mod">
-          <ac:chgData name="Xin Luo" userId="82312ee5779919a4" providerId="LiveId" clId="{8A5F66E1-7174-D546-B865-3F1108B5FC7B}" dt="2025-06-03T13:14:31.431" v="1733" actId="14100"/>
-          <ac:picMkLst>
-            <pc:docMk/>
-            <pc:sldMk cId="4239811127" sldId="2761"/>
-            <ac:picMk id="17" creationId="{ECD981E9-B635-6A40-F31E-DEA2A165E1C0}"/>
-          </ac:picMkLst>
-        </pc:picChg>
-        <pc:picChg chg="add mod">
-          <ac:chgData name="Xin Luo" userId="82312ee5779919a4" providerId="LiveId" clId="{8A5F66E1-7174-D546-B865-3F1108B5FC7B}" dt="2025-06-03T13:14:31.431" v="1733" actId="14100"/>
-          <ac:picMkLst>
-            <pc:docMk/>
-            <pc:sldMk cId="4239811127" sldId="2761"/>
-            <ac:picMk id="19" creationId="{E590BFFA-69DB-8D65-99C1-B12BC8F5E792}"/>
-          </ac:picMkLst>
-        </pc:picChg>
-      </pc:sldChg>
-      <pc:sldChg chg="addSp delSp modSp add mod">
-        <pc:chgData name="Xin Luo" userId="82312ee5779919a4" providerId="LiveId" clId="{8A5F66E1-7174-D546-B865-3F1108B5FC7B}" dt="2025-06-03T13:48:25.962" v="1917" actId="1076"/>
-        <pc:sldMkLst>
-          <pc:docMk/>
-          <pc:sldMk cId="1762228949" sldId="2762"/>
-        </pc:sldMkLst>
-        <pc:spChg chg="mod">
-          <ac:chgData name="Xin Luo" userId="82312ee5779919a4" providerId="LiveId" clId="{8A5F66E1-7174-D546-B865-3F1108B5FC7B}" dt="2025-05-25T14:28:38.390" v="483" actId="20577"/>
-          <ac:spMkLst>
-            <pc:docMk/>
-            <pc:sldMk cId="1762228949" sldId="2762"/>
-            <ac:spMk id="2" creationId="{F3751102-9952-796E-F7D3-86E60C84C66C}"/>
-          </ac:spMkLst>
-        </pc:spChg>
-        <pc:spChg chg="add del mod">
-          <ac:chgData name="Xin Luo" userId="82312ee5779919a4" providerId="LiveId" clId="{8A5F66E1-7174-D546-B865-3F1108B5FC7B}" dt="2025-06-03T13:46:05.480" v="1768" actId="478"/>
-          <ac:spMkLst>
-            <pc:docMk/>
-            <pc:sldMk cId="1762228949" sldId="2762"/>
-            <ac:spMk id="5" creationId="{B5CB38BB-D919-DC80-49C7-BDF520B493C5}"/>
-          </ac:spMkLst>
-        </pc:spChg>
-        <pc:spChg chg="mod">
-          <ac:chgData name="Xin Luo" userId="82312ee5779919a4" providerId="LiveId" clId="{8A5F66E1-7174-D546-B865-3F1108B5FC7B}" dt="2025-06-03T13:48:22.057" v="1916" actId="2710"/>
-          <ac:spMkLst>
-            <pc:docMk/>
-            <pc:sldMk cId="1762228949" sldId="2762"/>
-            <ac:spMk id="9" creationId="{BA26200F-C47E-DEE8-29A1-7E171038F816}"/>
-          </ac:spMkLst>
-        </pc:spChg>
-        <pc:picChg chg="add mod">
-          <ac:chgData name="Xin Luo" userId="82312ee5779919a4" providerId="LiveId" clId="{8A5F66E1-7174-D546-B865-3F1108B5FC7B}" dt="2025-06-03T13:48:25.962" v="1917" actId="1076"/>
-          <ac:picMkLst>
-            <pc:docMk/>
-            <pc:sldMk cId="1762228949" sldId="2762"/>
-            <ac:picMk id="6" creationId="{41FD0EA2-D850-FC17-5118-938E3DC97232}"/>
-          </ac:picMkLst>
-        </pc:picChg>
-        <pc:picChg chg="add del mod">
-          <ac:chgData name="Xin Luo" userId="82312ee5779919a4" providerId="LiveId" clId="{8A5F66E1-7174-D546-B865-3F1108B5FC7B}" dt="2025-06-03T13:46:57.028" v="1873" actId="478"/>
-          <ac:picMkLst>
-            <pc:docMk/>
-            <pc:sldMk cId="1762228949" sldId="2762"/>
-            <ac:picMk id="11" creationId="{7DE83ADE-132A-F6F4-250C-EA26954029EF}"/>
-          </ac:picMkLst>
-        </pc:picChg>
-        <pc:picChg chg="add del mod">
-          <ac:chgData name="Xin Luo" userId="82312ee5779919a4" providerId="LiveId" clId="{8A5F66E1-7174-D546-B865-3F1108B5FC7B}" dt="2025-06-03T13:46:03.604" v="1767" actId="478"/>
-          <ac:picMkLst>
-            <pc:docMk/>
-            <pc:sldMk cId="1762228949" sldId="2762"/>
-            <ac:picMk id="13" creationId="{4CFC5FF9-5985-2AC0-6891-9B7257452A15}"/>
-          </ac:picMkLst>
-        </pc:picChg>
-      </pc:sldChg>
-      <pc:sldChg chg="addSp delSp modSp add del mod ord">
-        <pc:chgData name="Xin Luo" userId="82312ee5779919a4" providerId="LiveId" clId="{8A5F66E1-7174-D546-B865-3F1108B5FC7B}" dt="2025-06-03T14:54:05.468" v="2151" actId="2696"/>
-        <pc:sldMkLst>
-          <pc:docMk/>
-          <pc:sldMk cId="3779566759" sldId="2763"/>
-        </pc:sldMkLst>
-      </pc:sldChg>
-      <pc:sldChg chg="addSp delSp modSp add mod ord">
-        <pc:chgData name="Xin Luo" userId="82312ee5779919a4" providerId="LiveId" clId="{8A5F66E1-7174-D546-B865-3F1108B5FC7B}" dt="2025-06-03T14:54:01.210" v="2150" actId="404"/>
-        <pc:sldMkLst>
-          <pc:docMk/>
-          <pc:sldMk cId="3124329379" sldId="2764"/>
-        </pc:sldMkLst>
-        <pc:spChg chg="mod">
-          <ac:chgData name="Xin Luo" userId="82312ee5779919a4" providerId="LiveId" clId="{8A5F66E1-7174-D546-B865-3F1108B5FC7B}" dt="2025-05-25T14:51:30.889" v="741" actId="1076"/>
-          <ac:spMkLst>
-            <pc:docMk/>
-            <pc:sldMk cId="3124329379" sldId="2764"/>
-            <ac:spMk id="2" creationId="{2AD62CF8-315D-013C-349A-B5F0D417B2D7}"/>
-          </ac:spMkLst>
-        </pc:spChg>
-        <pc:spChg chg="add mod">
-          <ac:chgData name="Xin Luo" userId="82312ee5779919a4" providerId="LiveId" clId="{8A5F66E1-7174-D546-B865-3F1108B5FC7B}" dt="2025-06-03T14:54:01.210" v="2150" actId="404"/>
-          <ac:spMkLst>
-            <pc:docMk/>
-            <pc:sldMk cId="3124329379" sldId="2764"/>
-            <ac:spMk id="5" creationId="{6DD14B4C-57D8-A716-7017-2C654A77F1F6}"/>
-          </ac:spMkLst>
-        </pc:spChg>
-        <pc:graphicFrameChg chg="add mod modGraphic">
-          <ac:chgData name="Xin Luo" userId="82312ee5779919a4" providerId="LiveId" clId="{8A5F66E1-7174-D546-B865-3F1108B5FC7B}" dt="2025-06-03T14:50:10.562" v="2112" actId="1038"/>
-          <ac:graphicFrameMkLst>
-            <pc:docMk/>
-            <pc:sldMk cId="3124329379" sldId="2764"/>
-            <ac:graphicFrameMk id="13" creationId="{DCFA68BD-4092-46B8-5D5F-4A7585046EA0}"/>
-          </ac:graphicFrameMkLst>
-        </pc:graphicFrameChg>
-        <pc:picChg chg="add mod">
-          <ac:chgData name="Xin Luo" userId="82312ee5779919a4" providerId="LiveId" clId="{8A5F66E1-7174-D546-B865-3F1108B5FC7B}" dt="2025-06-03T14:53:39.786" v="2128" actId="1036"/>
-          <ac:picMkLst>
-            <pc:docMk/>
-            <pc:sldMk cId="3124329379" sldId="2764"/>
-            <ac:picMk id="4" creationId="{C273D732-F19B-14C8-9145-F3B0E6EC1A58}"/>
-          </ac:picMkLst>
-        </pc:picChg>
-        <pc:picChg chg="add mod">
-          <ac:chgData name="Xin Luo" userId="82312ee5779919a4" providerId="LiveId" clId="{8A5F66E1-7174-D546-B865-3F1108B5FC7B}" dt="2025-06-03T14:53:42.101" v="2136" actId="1036"/>
-          <ac:picMkLst>
-            <pc:docMk/>
-            <pc:sldMk cId="3124329379" sldId="2764"/>
-            <ac:picMk id="11" creationId="{0FDAFE3F-8703-4CB2-46A8-A4BBA9CF0E14}"/>
-          </ac:picMkLst>
-        </pc:picChg>
-      </pc:sldChg>
-      <pc:sldChg chg="addSp delSp modSp add del mod">
-        <pc:chgData name="Xin Luo" userId="82312ee5779919a4" providerId="LiveId" clId="{8A5F66E1-7174-D546-B865-3F1108B5FC7B}" dt="2025-06-03T14:03:22.453" v="1944" actId="2696"/>
-        <pc:sldMkLst>
-          <pc:docMk/>
-          <pc:sldMk cId="2550339796" sldId="2765"/>
-        </pc:sldMkLst>
-        <pc:spChg chg="mod">
-          <ac:chgData name="Xin Luo" userId="82312ee5779919a4" providerId="LiveId" clId="{8A5F66E1-7174-D546-B865-3F1108B5FC7B}" dt="2025-06-03T14:02:21.503" v="1929" actId="404"/>
-          <ac:spMkLst>
-            <pc:docMk/>
-            <pc:sldMk cId="2550339796" sldId="2765"/>
-            <ac:spMk id="9" creationId="{B3D3313A-DE61-3D70-0343-BB1A7BDE43D9}"/>
-          </ac:spMkLst>
-        </pc:spChg>
-      </pc:sldChg>
-      <pc:sldChg chg="addSp delSp modSp add mod ord">
-        <pc:chgData name="Xin Luo" userId="82312ee5779919a4" providerId="LiveId" clId="{8A5F66E1-7174-D546-B865-3F1108B5FC7B}" dt="2025-06-03T15:05:23.554" v="2232" actId="1076"/>
-        <pc:sldMkLst>
-          <pc:docMk/>
-          <pc:sldMk cId="3026093860" sldId="2766"/>
-        </pc:sldMkLst>
-        <pc:spChg chg="del mod">
-          <ac:chgData name="Xin Luo" userId="82312ee5779919a4" providerId="LiveId" clId="{8A5F66E1-7174-D546-B865-3F1108B5FC7B}" dt="2025-06-03T14:18:29.719" v="2069" actId="478"/>
-          <ac:spMkLst>
-            <pc:docMk/>
-            <pc:sldMk cId="3026093860" sldId="2766"/>
-            <ac:spMk id="2" creationId="{01553FB6-82EF-F411-2441-1F9A9185C57A}"/>
-          </ac:spMkLst>
-        </pc:spChg>
-        <pc:spChg chg="add mod">
-          <ac:chgData name="Xin Luo" userId="82312ee5779919a4" providerId="LiveId" clId="{8A5F66E1-7174-D546-B865-3F1108B5FC7B}" dt="2025-06-03T15:05:23.554" v="2232" actId="1076"/>
-          <ac:spMkLst>
-            <pc:docMk/>
-            <pc:sldMk cId="3026093860" sldId="2766"/>
-            <ac:spMk id="4" creationId="{AD5DB676-A1C6-A827-852E-C386150145FF}"/>
-          </ac:spMkLst>
-        </pc:spChg>
-        <pc:spChg chg="add del mod">
-          <ac:chgData name="Xin Luo" userId="82312ee5779919a4" providerId="LiveId" clId="{8A5F66E1-7174-D546-B865-3F1108B5FC7B}" dt="2025-06-03T14:19:33.435" v="2088" actId="478"/>
-          <ac:spMkLst>
-            <pc:docMk/>
-            <pc:sldMk cId="3026093860" sldId="2766"/>
-            <ac:spMk id="5" creationId="{84FAF5DF-C165-7F99-B456-1346C9DD6BBA}"/>
-          </ac:spMkLst>
-        </pc:spChg>
-        <pc:spChg chg="add mod">
-          <ac:chgData name="Xin Luo" userId="82312ee5779919a4" providerId="LiveId" clId="{8A5F66E1-7174-D546-B865-3F1108B5FC7B}" dt="2025-06-03T14:20:04.965" v="2096" actId="1076"/>
-          <ac:spMkLst>
-            <pc:docMk/>
-            <pc:sldMk cId="3026093860" sldId="2766"/>
-            <ac:spMk id="7" creationId="{1DDF56E2-F06D-FCC1-4ABB-7D3884DFE383}"/>
-          </ac:spMkLst>
-        </pc:spChg>
-        <pc:spChg chg="del mod">
-          <ac:chgData name="Xin Luo" userId="82312ee5779919a4" providerId="LiveId" clId="{8A5F66E1-7174-D546-B865-3F1108B5FC7B}" dt="2025-06-03T14:18:29.719" v="2069" actId="478"/>
-          <ac:spMkLst>
-            <pc:docMk/>
-            <pc:sldMk cId="3026093860" sldId="2766"/>
-            <ac:spMk id="9" creationId="{95D9EDFE-8041-195E-8B29-A5FE1BB4E86E}"/>
-          </ac:spMkLst>
-        </pc:spChg>
-        <pc:spChg chg="add del mod">
-          <ac:chgData name="Xin Luo" userId="82312ee5779919a4" providerId="LiveId" clId="{8A5F66E1-7174-D546-B865-3F1108B5FC7B}" dt="2025-06-03T14:19:08.357" v="2080" actId="478"/>
-          <ac:spMkLst>
-            <pc:docMk/>
-            <pc:sldMk cId="3026093860" sldId="2766"/>
-            <ac:spMk id="10" creationId="{BC7BF9C3-241D-E56C-19F2-DD9799DB6AAF}"/>
-          </ac:spMkLst>
-        </pc:spChg>
-        <pc:picChg chg="add mod">
-          <ac:chgData name="Xin Luo" userId="82312ee5779919a4" providerId="LiveId" clId="{8A5F66E1-7174-D546-B865-3F1108B5FC7B}" dt="2025-06-03T14:20:04.965" v="2096" actId="1076"/>
-          <ac:picMkLst>
-            <pc:docMk/>
-            <pc:sldMk cId="3026093860" sldId="2766"/>
-            <ac:picMk id="6" creationId="{C872820F-E35C-53C7-4222-9656D5EC7A7D}"/>
-          </ac:picMkLst>
-        </pc:picChg>
-        <pc:picChg chg="add del mod">
-          <ac:chgData name="Xin Luo" userId="82312ee5779919a4" providerId="LiveId" clId="{8A5F66E1-7174-D546-B865-3F1108B5FC7B}" dt="2025-06-03T14:19:08.357" v="2080" actId="478"/>
-          <ac:picMkLst>
-            <pc:docMk/>
-            <pc:sldMk cId="3026093860" sldId="2766"/>
-            <ac:picMk id="8" creationId="{C42A79CE-28AC-9DA9-54AD-6F748AEE68D8}"/>
-          </ac:picMkLst>
-        </pc:picChg>
-      </pc:sldChg>
-      <pc:sldChg chg="addSp delSp modSp add mod ord modNotesTx">
-        <pc:chgData name="Xin Luo" userId="82312ee5779919a4" providerId="LiveId" clId="{8A5F66E1-7174-D546-B865-3F1108B5FC7B}" dt="2025-06-03T15:12:23.661" v="2440" actId="1076"/>
-        <pc:sldMkLst>
-          <pc:docMk/>
-          <pc:sldMk cId="3818233991" sldId="2767"/>
-        </pc:sldMkLst>
-        <pc:spChg chg="add mod">
-          <ac:chgData name="Xin Luo" userId="82312ee5779919a4" providerId="LiveId" clId="{8A5F66E1-7174-D546-B865-3F1108B5FC7B}" dt="2025-06-03T15:08:50.152" v="2377" actId="313"/>
-          <ac:spMkLst>
-            <pc:docMk/>
-            <pc:sldMk cId="3818233991" sldId="2767"/>
-            <ac:spMk id="4" creationId="{1DEB7E53-054F-6B83-1649-F9D39F7A0CA9}"/>
-          </ac:spMkLst>
-        </pc:spChg>
-        <pc:spChg chg="del mod">
-          <ac:chgData name="Xin Luo" userId="82312ee5779919a4" providerId="LiveId" clId="{8A5F66E1-7174-D546-B865-3F1108B5FC7B}" dt="2025-06-03T14:56:28.351" v="2156" actId="478"/>
-          <ac:spMkLst>
-            <pc:docMk/>
-            <pc:sldMk cId="3818233991" sldId="2767"/>
-            <ac:spMk id="8" creationId="{DA20CE17-F392-0282-FD82-C5AAA3F5586D}"/>
-          </ac:spMkLst>
-        </pc:spChg>
-        <pc:spChg chg="add mod">
-          <ac:chgData name="Xin Luo" userId="82312ee5779919a4" providerId="LiveId" clId="{8A5F66E1-7174-D546-B865-3F1108B5FC7B}" dt="2025-06-03T15:09:42.045" v="2393" actId="2711"/>
-          <ac:spMkLst>
-            <pc:docMk/>
-            <pc:sldMk cId="3818233991" sldId="2767"/>
-            <ac:spMk id="9" creationId="{B93366B1-70CE-B1D6-0BF7-1D7953FA5FE1}"/>
-          </ac:spMkLst>
-        </pc:spChg>
-        <pc:spChg chg="add del mod">
-          <ac:chgData name="Xin Luo" userId="82312ee5779919a4" providerId="LiveId" clId="{8A5F66E1-7174-D546-B865-3F1108B5FC7B}" dt="2025-06-03T14:56:26.677" v="2154" actId="478"/>
-          <ac:spMkLst>
-            <pc:docMk/>
-            <pc:sldMk cId="3818233991" sldId="2767"/>
-            <ac:spMk id="13" creationId="{91431608-886F-1B09-0622-27600EB45E1B}"/>
-          </ac:spMkLst>
-        </pc:spChg>
-        <pc:spChg chg="add del mod">
-          <ac:chgData name="Xin Luo" userId="82312ee5779919a4" providerId="LiveId" clId="{8A5F66E1-7174-D546-B865-3F1108B5FC7B}" dt="2025-06-03T14:56:27.615" v="2155" actId="478"/>
-          <ac:spMkLst>
-            <pc:docMk/>
-            <pc:sldMk cId="3818233991" sldId="2767"/>
-            <ac:spMk id="14" creationId="{70AACC5A-3BD5-EAA6-A32B-BDE84C8343FC}"/>
-          </ac:spMkLst>
-        </pc:spChg>
-        <pc:spChg chg="add mod">
-          <ac:chgData name="Xin Luo" userId="82312ee5779919a4" providerId="LiveId" clId="{8A5F66E1-7174-D546-B865-3F1108B5FC7B}" dt="2025-06-03T15:11:00.361" v="2424" actId="14100"/>
-          <ac:spMkLst>
-            <pc:docMk/>
-            <pc:sldMk cId="3818233991" sldId="2767"/>
-            <ac:spMk id="16" creationId="{67B1DCB3-5792-FEF1-11B9-3F7CBC07CB50}"/>
-          </ac:spMkLst>
-        </pc:spChg>
-        <pc:spChg chg="add mod">
-          <ac:chgData name="Xin Luo" userId="82312ee5779919a4" providerId="LiveId" clId="{8A5F66E1-7174-D546-B865-3F1108B5FC7B}" dt="2025-06-03T15:12:23.661" v="2440" actId="1076"/>
-          <ac:spMkLst>
-            <pc:docMk/>
-            <pc:sldMk cId="3818233991" sldId="2767"/>
-            <ac:spMk id="18" creationId="{F9525BFB-571A-23E8-144E-DA888D169137}"/>
-          </ac:spMkLst>
-        </pc:spChg>
-        <pc:grpChg chg="add mod">
-          <ac:chgData name="Xin Luo" userId="82312ee5779919a4" providerId="LiveId" clId="{8A5F66E1-7174-D546-B865-3F1108B5FC7B}" dt="2025-06-03T15:12:23.661" v="2440" actId="1076"/>
-          <ac:grpSpMkLst>
-            <pc:docMk/>
-            <pc:sldMk cId="3818233991" sldId="2767"/>
-            <ac:grpSpMk id="10" creationId="{2E26A4AA-376F-EC56-B745-6A8A4653919D}"/>
-          </ac:grpSpMkLst>
-        </pc:grpChg>
-        <pc:grpChg chg="add mod">
-          <ac:chgData name="Xin Luo" userId="82312ee5779919a4" providerId="LiveId" clId="{8A5F66E1-7174-D546-B865-3F1108B5FC7B}" dt="2025-06-03T15:12:23.661" v="2440" actId="1076"/>
-          <ac:grpSpMkLst>
-            <pc:docMk/>
-            <pc:sldMk cId="3818233991" sldId="2767"/>
-            <ac:grpSpMk id="17" creationId="{B7FB21EB-0365-F3A9-6120-E29D0282212C}"/>
-          </ac:grpSpMkLst>
-        </pc:grpChg>
-        <pc:picChg chg="add del mod">
-          <ac:chgData name="Xin Luo" userId="82312ee5779919a4" providerId="LiveId" clId="{8A5F66E1-7174-D546-B865-3F1108B5FC7B}" dt="2025-06-03T14:56:25.091" v="2152" actId="478"/>
-          <ac:picMkLst>
-            <pc:docMk/>
-            <pc:sldMk cId="3818233991" sldId="2767"/>
-            <ac:picMk id="5" creationId="{0D4CA41C-7F00-1552-B4A8-BD6881F8C10D}"/>
-          </ac:picMkLst>
-        </pc:picChg>
-        <pc:picChg chg="add mod">
-          <ac:chgData name="Xin Luo" userId="82312ee5779919a4" providerId="LiveId" clId="{8A5F66E1-7174-D546-B865-3F1108B5FC7B}" dt="2025-06-03T15:09:22.869" v="2383" actId="27614"/>
-          <ac:picMkLst>
-            <pc:docMk/>
-            <pc:sldMk cId="3818233991" sldId="2767"/>
-            <ac:picMk id="7" creationId="{2B5BD91C-E1FD-857D-5D3E-3A86A9CE84CA}"/>
-          </ac:picMkLst>
-        </pc:picChg>
-        <pc:picChg chg="add del mod">
-          <ac:chgData name="Xin Luo" userId="82312ee5779919a4" providerId="LiveId" clId="{8A5F66E1-7174-D546-B865-3F1108B5FC7B}" dt="2025-06-03T14:56:25.602" v="2153" actId="478"/>
-          <ac:picMkLst>
-            <pc:docMk/>
-            <pc:sldMk cId="3818233991" sldId="2767"/>
-            <ac:picMk id="11" creationId="{462C706F-8B6A-6133-D9F0-BEC1F88DA25E}"/>
-          </ac:picMkLst>
-        </pc:picChg>
-        <pc:picChg chg="add mod">
-          <ac:chgData name="Xin Luo" userId="82312ee5779919a4" providerId="LiveId" clId="{8A5F66E1-7174-D546-B865-3F1108B5FC7B}" dt="2025-06-03T15:10:24.581" v="2400" actId="14100"/>
-          <ac:picMkLst>
-            <pc:docMk/>
-            <pc:sldMk cId="3818233991" sldId="2767"/>
-            <ac:picMk id="15" creationId="{0D0A852A-4DFE-A276-D829-3256A4793510}"/>
-          </ac:picMkLst>
-        </pc:picChg>
-      </pc:sldChg>
-      <pc:sldChg chg="addSp delSp modSp add mod">
-        <pc:chgData name="Xin Luo" userId="82312ee5779919a4" providerId="LiveId" clId="{8A5F66E1-7174-D546-B865-3F1108B5FC7B}" dt="2025-06-03T14:02:57.151" v="1943" actId="1036"/>
-        <pc:sldMkLst>
-          <pc:docMk/>
-          <pc:sldMk cId="2071198221" sldId="2768"/>
-        </pc:sldMkLst>
-        <pc:spChg chg="mod">
-          <ac:chgData name="Xin Luo" userId="82312ee5779919a4" providerId="LiveId" clId="{8A5F66E1-7174-D546-B865-3F1108B5FC7B}" dt="2025-06-03T14:02:57.151" v="1943" actId="1036"/>
-          <ac:spMkLst>
-            <pc:docMk/>
-            <pc:sldMk cId="2071198221" sldId="2768"/>
-            <ac:spMk id="9" creationId="{21B96A3F-48BA-7F06-C58C-56F60D3CDE76}"/>
-          </ac:spMkLst>
-        </pc:spChg>
-        <pc:graphicFrameChg chg="add mod modGraphic">
-          <ac:chgData name="Xin Luo" userId="82312ee5779919a4" providerId="LiveId" clId="{8A5F66E1-7174-D546-B865-3F1108B5FC7B}" dt="2025-06-03T14:02:32.963" v="1931" actId="14100"/>
-          <ac:graphicFrameMkLst>
-            <pc:docMk/>
-            <pc:sldMk cId="2071198221" sldId="2768"/>
-            <ac:graphicFrameMk id="4" creationId="{7AA18919-A5D0-7094-77A0-3956BAD95344}"/>
-          </ac:graphicFrameMkLst>
-        </pc:graphicFrameChg>
-      </pc:sldChg>
-      <pc:sldChg chg="delSp modSp add del mod">
-        <pc:chgData name="Xin Luo" userId="82312ee5779919a4" providerId="LiveId" clId="{8A5F66E1-7174-D546-B865-3F1108B5FC7B}" dt="2025-06-03T13:40:38.330" v="1766" actId="2696"/>
-        <pc:sldMkLst>
-          <pc:docMk/>
-          <pc:sldMk cId="60436878" sldId="2771"/>
-        </pc:sldMkLst>
-        <pc:spChg chg="del mod">
-          <ac:chgData name="Xin Luo" userId="82312ee5779919a4" providerId="LiveId" clId="{8A5F66E1-7174-D546-B865-3F1108B5FC7B}" dt="2025-06-03T13:15:01.758" v="1739" actId="478"/>
-          <ac:spMkLst>
-            <pc:docMk/>
-            <pc:sldMk cId="60436878" sldId="2771"/>
-            <ac:spMk id="9" creationId="{4C666DAD-5020-DB3F-09C8-DA3913A2202E}"/>
-          </ac:spMkLst>
-        </pc:spChg>
-        <pc:spChg chg="del">
-          <ac:chgData name="Xin Luo" userId="82312ee5779919a4" providerId="LiveId" clId="{8A5F66E1-7174-D546-B865-3F1108B5FC7B}" dt="2025-06-03T13:14:58.432" v="1737" actId="478"/>
-          <ac:spMkLst>
-            <pc:docMk/>
-            <pc:sldMk cId="60436878" sldId="2771"/>
-            <ac:spMk id="10" creationId="{AC896DC9-DBF8-0AE2-6308-095A504B2437}"/>
-          </ac:spMkLst>
-        </pc:spChg>
-        <pc:graphicFrameChg chg="del">
-          <ac:chgData name="Xin Luo" userId="82312ee5779919a4" providerId="LiveId" clId="{8A5F66E1-7174-D546-B865-3F1108B5FC7B}" dt="2025-06-03T13:12:35.131" v="1715" actId="478"/>
-          <ac:graphicFrameMkLst>
-            <pc:docMk/>
-            <pc:sldMk cId="60436878" sldId="2771"/>
-            <ac:graphicFrameMk id="4" creationId="{077FA1B1-57E5-ADA0-1C1F-D890C398A0D6}"/>
-          </ac:graphicFrameMkLst>
-        </pc:graphicFrameChg>
-        <pc:picChg chg="del">
-          <ac:chgData name="Xin Luo" userId="82312ee5779919a4" providerId="LiveId" clId="{8A5F66E1-7174-D546-B865-3F1108B5FC7B}" dt="2025-06-03T13:12:41.871" v="1716" actId="478"/>
-          <ac:picMkLst>
-            <pc:docMk/>
-            <pc:sldMk cId="60436878" sldId="2771"/>
-            <ac:picMk id="6" creationId="{CD36AAA5-561D-7BFD-EDEC-370264827263}"/>
-          </ac:picMkLst>
-        </pc:picChg>
-        <pc:picChg chg="del">
-          <ac:chgData name="Xin Luo" userId="82312ee5779919a4" providerId="LiveId" clId="{8A5F66E1-7174-D546-B865-3F1108B5FC7B}" dt="2025-06-03T13:12:41.871" v="1716" actId="478"/>
-          <ac:picMkLst>
-            <pc:docMk/>
-            <pc:sldMk cId="60436878" sldId="2771"/>
-            <ac:picMk id="8" creationId="{219F120A-E5B0-CBBC-7A26-1156B31091C4}"/>
-          </ac:picMkLst>
-        </pc:picChg>
-      </pc:sldChg>
-      <pc:sldChg chg="add del">
-        <pc:chgData name="Xin Luo" userId="82312ee5779919a4" providerId="LiveId" clId="{8A5F66E1-7174-D546-B865-3F1108B5FC7B}" dt="2025-06-03T14:17:19.358" v="1948"/>
-        <pc:sldMkLst>
-          <pc:docMk/>
-          <pc:sldMk cId="214639034" sldId="2771"/>
-        </pc:sldMkLst>
-      </pc:sldChg>
-      <pc:sldChg chg="addSp delSp modSp add mod modNotesTx">
-        <pc:chgData name="Xin Luo" userId="82312ee5779919a4" providerId="LiveId" clId="{8A5F66E1-7174-D546-B865-3F1108B5FC7B}" dt="2025-06-03T15:57:29.321" v="2603" actId="20577"/>
-        <pc:sldMkLst>
-          <pc:docMk/>
-          <pc:sldMk cId="1300503800" sldId="2771"/>
-        </pc:sldMkLst>
-        <pc:spChg chg="mod">
-          <ac:chgData name="Xin Luo" userId="82312ee5779919a4" providerId="LiveId" clId="{8A5F66E1-7174-D546-B865-3F1108B5FC7B}" dt="2025-06-03T15:56:48.942" v="2587" actId="14100"/>
-          <ac:spMkLst>
-            <pc:docMk/>
-            <pc:sldMk cId="1300503800" sldId="2771"/>
-            <ac:spMk id="4" creationId="{8A605C64-116B-C41C-CFB7-A6EF466A2FCC}"/>
-          </ac:spMkLst>
-        </pc:spChg>
-        <pc:spChg chg="del topLvl">
-          <ac:chgData name="Xin Luo" userId="82312ee5779919a4" providerId="LiveId" clId="{8A5F66E1-7174-D546-B865-3F1108B5FC7B}" dt="2025-06-03T15:43:57.740" v="2444" actId="478"/>
-          <ac:spMkLst>
-            <pc:docMk/>
-            <pc:sldMk cId="1300503800" sldId="2771"/>
-            <ac:spMk id="16" creationId="{E6E15C12-B895-25B2-0424-CD08091923F9}"/>
-          </ac:spMkLst>
-        </pc:spChg>
-        <pc:spChg chg="del">
-          <ac:chgData name="Xin Luo" userId="82312ee5779919a4" providerId="LiveId" clId="{8A5F66E1-7174-D546-B865-3F1108B5FC7B}" dt="2025-06-03T15:43:58.478" v="2445" actId="478"/>
-          <ac:spMkLst>
-            <pc:docMk/>
-            <pc:sldMk cId="1300503800" sldId="2771"/>
-            <ac:spMk id="18" creationId="{D7E23074-1FD9-80A8-3B7C-7E28DEAD7F4C}"/>
-          </ac:spMkLst>
-        </pc:spChg>
-        <pc:grpChg chg="del">
-          <ac:chgData name="Xin Luo" userId="82312ee5779919a4" providerId="LiveId" clId="{8A5F66E1-7174-D546-B865-3F1108B5FC7B}" dt="2025-06-03T15:43:54.372" v="2442" actId="478"/>
-          <ac:grpSpMkLst>
-            <pc:docMk/>
-            <pc:sldMk cId="1300503800" sldId="2771"/>
-            <ac:grpSpMk id="10" creationId="{86360010-CC01-D2DC-7A04-5B9DFDB0D4B1}"/>
-          </ac:grpSpMkLst>
-        </pc:grpChg>
-        <pc:grpChg chg="del">
-          <ac:chgData name="Xin Luo" userId="82312ee5779919a4" providerId="LiveId" clId="{8A5F66E1-7174-D546-B865-3F1108B5FC7B}" dt="2025-06-03T15:43:55.996" v="2443" actId="478"/>
-          <ac:grpSpMkLst>
-            <pc:docMk/>
-            <pc:sldMk cId="1300503800" sldId="2771"/>
-            <ac:grpSpMk id="17" creationId="{64E8F3C9-7856-A9C2-C719-AB54C04FD748}"/>
-          </ac:grpSpMkLst>
-        </pc:grpChg>
-        <pc:graphicFrameChg chg="add mod modGraphic">
-          <ac:chgData name="Xin Luo" userId="82312ee5779919a4" providerId="LiveId" clId="{8A5F66E1-7174-D546-B865-3F1108B5FC7B}" dt="2025-06-03T15:57:01.185" v="2588" actId="14100"/>
-          <ac:graphicFrameMkLst>
-            <pc:docMk/>
-            <pc:sldMk cId="1300503800" sldId="2771"/>
-            <ac:graphicFrameMk id="2" creationId="{6AB3EA3C-A976-D1C0-7F30-EAAFAFA1981A}"/>
-          </ac:graphicFrameMkLst>
-        </pc:graphicFrameChg>
-        <pc:picChg chg="add mod">
-          <ac:chgData name="Xin Luo" userId="82312ee5779919a4" providerId="LiveId" clId="{8A5F66E1-7174-D546-B865-3F1108B5FC7B}" dt="2025-06-03T15:57:23.164" v="2602" actId="1036"/>
-          <ac:picMkLst>
-            <pc:docMk/>
-            <pc:sldMk cId="1300503800" sldId="2771"/>
-            <ac:picMk id="6" creationId="{72EC4676-8BA1-E33F-4562-4BDA0F096DDF}"/>
-          </ac:picMkLst>
-        </pc:picChg>
-        <pc:picChg chg="del topLvl">
-          <ac:chgData name="Xin Luo" userId="82312ee5779919a4" providerId="LiveId" clId="{8A5F66E1-7174-D546-B865-3F1108B5FC7B}" dt="2025-06-03T15:43:55.996" v="2443" actId="478"/>
-          <ac:picMkLst>
-            <pc:docMk/>
-            <pc:sldMk cId="1300503800" sldId="2771"/>
-            <ac:picMk id="15" creationId="{EBB0407F-9BF0-0FAE-C27F-C77D0C8E4819}"/>
-          </ac:picMkLst>
-        </pc:picChg>
-      </pc:sldChg>
-      <pc:sldChg chg="add del">
-        <pc:chgData name="Xin Luo" userId="82312ee5779919a4" providerId="LiveId" clId="{8A5F66E1-7174-D546-B865-3F1108B5FC7B}" dt="2025-06-03T14:17:27.167" v="1950"/>
-        <pc:sldMkLst>
-          <pc:docMk/>
-          <pc:sldMk cId="3242464315" sldId="2771"/>
-        </pc:sldMkLst>
       </pc:sldChg>
     </pc:docChg>
   </pc:docChgLst>
@@ -1641,7 +878,7 @@
               </a14:hiddenFill>
             </a:ext>
             <a:ext uri="{FAA26D3D-D897-4be2-8F04-BA451C77F1D7}">
-              <ma14:placeholderFlag xmlns:ma14="http://schemas.microsoft.com/office/mac/drawingml/2011/main" xmlns="" val="1"/>
+              <ma14:placeholderFlag xmlns="" xmlns:ma14="http://schemas.microsoft.com/office/mac/drawingml/2011/main" val="1"/>
             </a:ext>
           </a:extLst>
         </p:spPr>
@@ -2029,7 +1266,7 @@
               </a14:hiddenLine>
             </a:ext>
             <a:ext uri="{FAA26D3D-D897-4be2-8F04-BA451C77F1D7}">
-              <ma14:placeholderFlag xmlns:ma14="http://schemas.microsoft.com/office/mac/drawingml/2011/main" xmlns="" val="1"/>
+              <ma14:placeholderFlag xmlns="" xmlns:ma14="http://schemas.microsoft.com/office/mac/drawingml/2011/main" val="1"/>
             </a:ext>
           </a:extLst>
         </p:spPr>
@@ -5040,7 +4277,7 @@
               </a14:hiddenLine>
             </a:ext>
             <a:ext uri="{FAA26D3D-D897-4be2-8F04-BA451C77F1D7}">
-              <ma14:placeholderFlag xmlns:ma14="http://schemas.microsoft.com/office/mac/drawingml/2011/main" xmlns="" val="1"/>
+              <ma14:placeholderFlag xmlns="" xmlns:ma14="http://schemas.microsoft.com/office/mac/drawingml/2011/main" val="1"/>
             </a:ext>
           </a:extLst>
         </p:spPr>
@@ -8736,7 +7973,7 @@
               </a14:hiddenLine>
             </a:ext>
             <a:ext uri="{FAA26D3D-D897-4be2-8F04-BA451C77F1D7}">
-              <ma14:placeholderFlag xmlns:ma14="http://schemas.microsoft.com/office/mac/drawingml/2011/main" xmlns="" val="1"/>
+              <ma14:placeholderFlag xmlns="" xmlns:ma14="http://schemas.microsoft.com/office/mac/drawingml/2011/main" val="1"/>
             </a:ext>
           </a:extLst>
         </p:spPr>
@@ -14639,14 +13876,14 @@
               <a:t>-</a:t>
             </a:r>
             <a:r>
-              <a:rPr lang="zh-CN" altLang="en-US" sz="3600" b="1" dirty="0">
+              <a:rPr lang="zh-CN" altLang="en-US" sz="3600" b="1">
                 <a:solidFill>
                   <a:srgbClr val="333333"/>
                 </a:solidFill>
                 <a:latin typeface="+mn-ea"/>
                 <a:ea typeface="+mn-ea"/>
               </a:rPr>
-              <a:t>文件操作练习</a:t>
+              <a:t>文件操作</a:t>
             </a:r>
             <a:endParaRPr lang="en-US" altLang="zh-CN" sz="3600" b="1" dirty="0">
               <a:solidFill>
